--- a/Architecture_Kubernetes.pptx
+++ b/Architecture_Kubernetes.pptx
@@ -11,6 +11,7 @@
     <p:sldId id="259" r:id="rId5"/>
     <p:sldId id="260" r:id="rId6"/>
     <p:sldId id="261" r:id="rId7"/>
+    <p:sldId id="262" r:id="rId13"/>
   </p:sldIdLst>
   <p:notesMasterIdLst>
     <p:notesMasterId r:id="rId8"/>
@@ -1584,7 +1585,7 @@
                 <a:ea typeface="Calibri" pitchFamily="34" charset="-122"/>
                 <a:cs typeface="Calibri" pitchFamily="34" charset="-120"/>
               </a:rPr>
-              <a:t>  |  </a:t>
+              <a:t xml:space="preserve">  |  </a:t>
             </a:r>
             <a:pPr indent="0" marL="0">
               <a:buNone/>
@@ -1612,7 +1613,7 @@
                 <a:ea typeface="Calibri" pitchFamily="34" charset="-122"/>
                 <a:cs typeface="Calibri" pitchFamily="34" charset="-120"/>
               </a:rPr>
-              <a:t>  |  </a:t>
+              <a:t xml:space="preserve">  |  </a:t>
             </a:r>
             <a:pPr indent="0" marL="0">
               <a:buNone/>
@@ -1640,7 +1641,7 @@
                 <a:ea typeface="Calibri" pitchFamily="34" charset="-122"/>
                 <a:cs typeface="Calibri" pitchFamily="34" charset="-120"/>
               </a:rPr>
-              <a:t>  |  </a:t>
+              <a:t xml:space="preserve">  |  </a:t>
             </a:r>
             <a:pPr indent="0" marL="0">
               <a:buNone/>
@@ -1800,7 +1801,7 @@
       </p:sp>
       <p:pic>
         <p:nvPicPr>
-          <p:cNvPr id="6" name="Image 0" descr="preencoded.png">    </p:cNvPr>
+          <p:cNvPr id="6" name="Image 0" descr="preencoded.png"/>
           <p:cNvPicPr>
             <a:picLocks noChangeAspect="1"/>
           </p:cNvPicPr>
@@ -2003,7 +2004,7 @@
       </p:sp>
       <p:pic>
         <p:nvPicPr>
-          <p:cNvPr id="12" name="Image 1" descr="preencoded.png">    </p:cNvPr>
+          <p:cNvPr id="12" name="Image 1" descr="preencoded.png"/>
           <p:cNvPicPr>
             <a:picLocks noChangeAspect="1"/>
           </p:cNvPicPr>
@@ -2066,7 +2067,7 @@
       </p:sp>
       <p:pic>
         <p:nvPicPr>
-          <p:cNvPr id="14" name="Image 2" descr="preencoded.png">    </p:cNvPr>
+          <p:cNvPr id="14" name="Image 2" descr="preencoded.png"/>
           <p:cNvPicPr>
             <a:picLocks noChangeAspect="1"/>
           </p:cNvPicPr>
@@ -2129,7 +2130,7 @@
       </p:sp>
       <p:pic>
         <p:nvPicPr>
-          <p:cNvPr id="16" name="Image 3" descr="preencoded.png">    </p:cNvPr>
+          <p:cNvPr id="16" name="Image 3" descr="preencoded.png"/>
           <p:cNvPicPr>
             <a:picLocks noChangeAspect="1"/>
           </p:cNvPicPr>
@@ -2192,7 +2193,7 @@
       </p:sp>
       <p:pic>
         <p:nvPicPr>
-          <p:cNvPr id="18" name="Image 4" descr="preencoded.png">    </p:cNvPr>
+          <p:cNvPr id="18" name="Image 4" descr="preencoded.png"/>
           <p:cNvPicPr>
             <a:picLocks noChangeAspect="1"/>
           </p:cNvPicPr>
@@ -2255,7 +2256,7 @@
       </p:sp>
       <p:pic>
         <p:nvPicPr>
-          <p:cNvPr id="20" name="Image 5" descr="preencoded.png">    </p:cNvPr>
+          <p:cNvPr id="20" name="Image 5" descr="preencoded.png"/>
           <p:cNvPicPr>
             <a:picLocks noChangeAspect="1"/>
           </p:cNvPicPr>
@@ -2365,7 +2366,7 @@
       </p:sp>
       <p:pic>
         <p:nvPicPr>
-          <p:cNvPr id="24" name="Image 6" descr="preencoded.png">    </p:cNvPr>
+          <p:cNvPr id="24" name="Image 6" descr="preencoded.png"/>
           <p:cNvPicPr>
             <a:picLocks noChangeAspect="1"/>
           </p:cNvPicPr>
@@ -2568,7 +2569,7 @@
       </p:sp>
       <p:pic>
         <p:nvPicPr>
-          <p:cNvPr id="30" name="Image 7" descr="preencoded.png">    </p:cNvPr>
+          <p:cNvPr id="30" name="Image 7" descr="preencoded.png"/>
           <p:cNvPicPr>
             <a:picLocks noChangeAspect="1"/>
           </p:cNvPicPr>
@@ -2631,7 +2632,7 @@
       </p:sp>
       <p:pic>
         <p:nvPicPr>
-          <p:cNvPr id="32" name="Image 8" descr="preencoded.png">    </p:cNvPr>
+          <p:cNvPr id="32" name="Image 8" descr="preencoded.png"/>
           <p:cNvPicPr>
             <a:picLocks noChangeAspect="1"/>
           </p:cNvPicPr>
@@ -2694,7 +2695,7 @@
       </p:sp>
       <p:pic>
         <p:nvPicPr>
-          <p:cNvPr id="34" name="Image 9" descr="preencoded.png">    </p:cNvPr>
+          <p:cNvPr id="34" name="Image 9" descr="preencoded.png"/>
           <p:cNvPicPr>
             <a:picLocks noChangeAspect="1"/>
           </p:cNvPicPr>
@@ -2757,7 +2758,7 @@
       </p:sp>
       <p:pic>
         <p:nvPicPr>
-          <p:cNvPr id="36" name="Image 10" descr="preencoded.png">    </p:cNvPr>
+          <p:cNvPr id="36" name="Image 10" descr="preencoded.png"/>
           <p:cNvPicPr>
             <a:picLocks noChangeAspect="1"/>
           </p:cNvPicPr>
@@ -2820,7 +2821,7 @@
       </p:sp>
       <p:pic>
         <p:nvPicPr>
-          <p:cNvPr id="38" name="Image 11" descr="preencoded.png">    </p:cNvPr>
+          <p:cNvPr id="38" name="Image 11" descr="preencoded.png"/>
           <p:cNvPicPr>
             <a:picLocks noChangeAspect="1"/>
           </p:cNvPicPr>
@@ -2930,7 +2931,7 @@
       </p:sp>
       <p:pic>
         <p:nvPicPr>
-          <p:cNvPr id="42" name="Image 12" descr="preencoded.png">    </p:cNvPr>
+          <p:cNvPr id="42" name="Image 12" descr="preencoded.png"/>
           <p:cNvPicPr>
             <a:picLocks noChangeAspect="1"/>
           </p:cNvPicPr>
@@ -3133,7 +3134,7 @@
       </p:sp>
       <p:pic>
         <p:nvPicPr>
-          <p:cNvPr id="48" name="Image 13" descr="preencoded.png">    </p:cNvPr>
+          <p:cNvPr id="48" name="Image 13" descr="preencoded.png"/>
           <p:cNvPicPr>
             <a:picLocks noChangeAspect="1"/>
           </p:cNvPicPr>
@@ -3196,7 +3197,7 @@
       </p:sp>
       <p:pic>
         <p:nvPicPr>
-          <p:cNvPr id="50" name="Image 14" descr="preencoded.png">    </p:cNvPr>
+          <p:cNvPr id="50" name="Image 14" descr="preencoded.png"/>
           <p:cNvPicPr>
             <a:picLocks noChangeAspect="1"/>
           </p:cNvPicPr>
@@ -3259,7 +3260,7 @@
       </p:sp>
       <p:pic>
         <p:nvPicPr>
-          <p:cNvPr id="52" name="Image 15" descr="preencoded.png">    </p:cNvPr>
+          <p:cNvPr id="52" name="Image 15" descr="preencoded.png"/>
           <p:cNvPicPr>
             <a:picLocks noChangeAspect="1"/>
           </p:cNvPicPr>
@@ -3322,7 +3323,7 @@
       </p:sp>
       <p:pic>
         <p:nvPicPr>
-          <p:cNvPr id="54" name="Image 16" descr="preencoded.png">    </p:cNvPr>
+          <p:cNvPr id="54" name="Image 16" descr="preencoded.png"/>
           <p:cNvPicPr>
             <a:picLocks noChangeAspect="1"/>
           </p:cNvPicPr>
@@ -3385,7 +3386,7 @@
       </p:sp>
       <p:pic>
         <p:nvPicPr>
-          <p:cNvPr id="56" name="Image 17" descr="preencoded.png">    </p:cNvPr>
+          <p:cNvPr id="56" name="Image 17" descr="preencoded.png"/>
           <p:cNvPicPr>
             <a:picLocks noChangeAspect="1"/>
           </p:cNvPicPr>
@@ -3665,7 +3666,7 @@
       </p:sp>
       <p:pic>
         <p:nvPicPr>
-          <p:cNvPr id="7" name="Image 0" descr="preencoded.png">    </p:cNvPr>
+          <p:cNvPr id="7" name="Image 0" descr="preencoded.png"/>
           <p:cNvPicPr>
             <a:picLocks noChangeAspect="1"/>
           </p:cNvPicPr>
@@ -3851,7 +3852,7 @@
       </p:sp>
       <p:pic>
         <p:nvPicPr>
-          <p:cNvPr id="13" name="Image 1" descr="preencoded.png">    </p:cNvPr>
+          <p:cNvPr id="13" name="Image 1" descr="preencoded.png"/>
           <p:cNvPicPr>
             <a:picLocks noChangeAspect="1"/>
           </p:cNvPicPr>
@@ -4037,7 +4038,7 @@
       </p:sp>
       <p:pic>
         <p:nvPicPr>
-          <p:cNvPr id="19" name="Image 2" descr="preencoded.png">    </p:cNvPr>
+          <p:cNvPr id="19" name="Image 2" descr="preencoded.png"/>
           <p:cNvPicPr>
             <a:picLocks noChangeAspect="1"/>
           </p:cNvPicPr>
@@ -5000,7 +5001,7 @@
       </p:sp>
       <p:pic>
         <p:nvPicPr>
-          <p:cNvPr id="7" name="Image 0" descr="preencoded.png">    </p:cNvPr>
+          <p:cNvPr id="7" name="Image 0" descr="preencoded.png"/>
           <p:cNvPicPr>
             <a:picLocks noChangeAspect="1"/>
           </p:cNvPicPr>
@@ -5186,7 +5187,7 @@
       </p:sp>
       <p:pic>
         <p:nvPicPr>
-          <p:cNvPr id="13" name="Image 1" descr="preencoded.png">    </p:cNvPr>
+          <p:cNvPr id="13" name="Image 1" descr="preencoded.png"/>
           <p:cNvPicPr>
             <a:picLocks noChangeAspect="1"/>
           </p:cNvPicPr>
@@ -5372,7 +5373,7 @@
       </p:sp>
       <p:pic>
         <p:nvPicPr>
-          <p:cNvPr id="19" name="Image 2" descr="preencoded.png">    </p:cNvPr>
+          <p:cNvPr id="19" name="Image 2" descr="preencoded.png"/>
           <p:cNvPicPr>
             <a:picLocks noChangeAspect="1"/>
           </p:cNvPicPr>
@@ -5558,7 +5559,7 @@
       </p:sp>
       <p:pic>
         <p:nvPicPr>
-          <p:cNvPr id="25" name="Image 3" descr="preencoded.png">    </p:cNvPr>
+          <p:cNvPr id="25" name="Image 3" descr="preencoded.png"/>
           <p:cNvPicPr>
             <a:picLocks noChangeAspect="1"/>
           </p:cNvPicPr>
@@ -5874,7 +5875,7 @@
       </p:sp>
       <p:pic>
         <p:nvPicPr>
-          <p:cNvPr id="6" name="Image 0" descr="preencoded.png">    </p:cNvPr>
+          <p:cNvPr id="6" name="Image 0" descr="preencoded.png"/>
           <p:cNvPicPr>
             <a:picLocks noChangeAspect="1"/>
           </p:cNvPicPr>
@@ -6567,7 +6568,7 @@
       </p:sp>
       <p:pic>
         <p:nvPicPr>
-          <p:cNvPr id="27" name="Image 1" descr="preencoded.png">    </p:cNvPr>
+          <p:cNvPr id="27" name="Image 1" descr="preencoded.png"/>
           <p:cNvPicPr>
             <a:picLocks noChangeAspect="1"/>
           </p:cNvPicPr>
@@ -7351,7 +7352,7 @@
       </p:sp>
       <p:pic>
         <p:nvPicPr>
-          <p:cNvPr id="6" name="Image 0" descr="preencoded.png">    </p:cNvPr>
+          <p:cNvPr id="6" name="Image 0" descr="preencoded.png"/>
           <p:cNvPicPr>
             <a:picLocks noChangeAspect="1"/>
           </p:cNvPicPr>
@@ -7414,7 +7415,7 @@
       </p:sp>
       <p:pic>
         <p:nvPicPr>
-          <p:cNvPr id="8" name="Image 1" descr="preencoded.png">    </p:cNvPr>
+          <p:cNvPr id="8" name="Image 1" descr="preencoded.png"/>
           <p:cNvPicPr>
             <a:picLocks noChangeAspect="1"/>
           </p:cNvPicPr>
@@ -7477,7 +7478,7 @@
       </p:sp>
       <p:pic>
         <p:nvPicPr>
-          <p:cNvPr id="10" name="Image 2" descr="preencoded.png">    </p:cNvPr>
+          <p:cNvPr id="10" name="Image 2" descr="preencoded.png"/>
           <p:cNvPicPr>
             <a:picLocks noChangeAspect="1"/>
           </p:cNvPicPr>
@@ -7540,7 +7541,7 @@
       </p:sp>
       <p:pic>
         <p:nvPicPr>
-          <p:cNvPr id="12" name="Image 3" descr="preencoded.png">    </p:cNvPr>
+          <p:cNvPr id="12" name="Image 3" descr="preencoded.png"/>
           <p:cNvPicPr>
             <a:picLocks noChangeAspect="1"/>
           </p:cNvPicPr>
@@ -7603,7 +7604,7 @@
       </p:sp>
       <p:pic>
         <p:nvPicPr>
-          <p:cNvPr id="14" name="Image 4" descr="preencoded.png">    </p:cNvPr>
+          <p:cNvPr id="14" name="Image 4" descr="preencoded.png"/>
           <p:cNvPicPr>
             <a:picLocks noChangeAspect="1"/>
           </p:cNvPicPr>
@@ -7666,7 +7667,7 @@
       </p:sp>
       <p:pic>
         <p:nvPicPr>
-          <p:cNvPr id="16" name="Image 5" descr="preencoded.png">    </p:cNvPr>
+          <p:cNvPr id="16" name="Image 5" descr="preencoded.png"/>
           <p:cNvPicPr>
             <a:picLocks noChangeAspect="1"/>
           </p:cNvPicPr>
@@ -7776,7 +7777,7 @@
       </p:sp>
       <p:pic>
         <p:nvPicPr>
-          <p:cNvPr id="20" name="Image 6" descr="preencoded.png">    </p:cNvPr>
+          <p:cNvPr id="20" name="Image 6" descr="preencoded.png"/>
           <p:cNvPicPr>
             <a:picLocks noChangeAspect="1"/>
           </p:cNvPicPr>
@@ -7839,7 +7840,7 @@
       </p:sp>
       <p:pic>
         <p:nvPicPr>
-          <p:cNvPr id="22" name="Image 7" descr="preencoded.png">    </p:cNvPr>
+          <p:cNvPr id="22" name="Image 7" descr="preencoded.png"/>
           <p:cNvPicPr>
             <a:picLocks noChangeAspect="1"/>
           </p:cNvPicPr>
@@ -7902,7 +7903,7 @@
       </p:sp>
       <p:pic>
         <p:nvPicPr>
-          <p:cNvPr id="24" name="Image 8" descr="preencoded.png">    </p:cNvPr>
+          <p:cNvPr id="24" name="Image 8" descr="preencoded.png"/>
           <p:cNvPicPr>
             <a:picLocks noChangeAspect="1"/>
           </p:cNvPicPr>
@@ -7965,7 +7966,7 @@
       </p:sp>
       <p:pic>
         <p:nvPicPr>
-          <p:cNvPr id="26" name="Image 9" descr="preencoded.png">    </p:cNvPr>
+          <p:cNvPr id="26" name="Image 9" descr="preencoded.png"/>
           <p:cNvPicPr>
             <a:picLocks noChangeAspect="1"/>
           </p:cNvPicPr>
@@ -8028,7 +8029,7 @@
       </p:sp>
       <p:pic>
         <p:nvPicPr>
-          <p:cNvPr id="28" name="Image 10" descr="preencoded.png">    </p:cNvPr>
+          <p:cNvPr id="28" name="Image 10" descr="preencoded.png"/>
           <p:cNvPicPr>
             <a:picLocks noChangeAspect="1"/>
           </p:cNvPicPr>
@@ -8091,7 +8092,7 @@
       </p:sp>
       <p:pic>
         <p:nvPicPr>
-          <p:cNvPr id="30" name="Image 11" descr="preencoded.png">    </p:cNvPr>
+          <p:cNvPr id="30" name="Image 11" descr="preencoded.png"/>
           <p:cNvPicPr>
             <a:picLocks noChangeAspect="1"/>
           </p:cNvPicPr>
@@ -8862,6 +8863,96 @@
           </a:p>
         </p:txBody>
       </p:sp>
+    </p:spTree>
+  </p:cSld>
+  <p:clrMapOvr>
+    <a:masterClrMapping/>
+  </p:clrMapOvr>
+</p:sld>
+</file>
+
+<file path=ppt/slides/slide7.xml><?xml version="1.0" encoding="utf-8"?>
+<p:sld xmlns:p="http://schemas.openxmlformats.org/presentationml/2006/main" xmlns:a="http://schemas.openxmlformats.org/drawingml/2006/main" xmlns:r="http://schemas.openxmlformats.org/officeDocument/2006/relationships" xmlns:xdr="http://schemas.openxmlformats.org/drawingml/2006/spreadsheetDrawing" xmlns:mc="http://schemas.openxmlformats.org/markup-compatibility/2006">
+  <p:cSld>
+    <p:bg>
+      <p:bgPr>
+        <a:solidFill>
+          <a:srgbClr val="0F2B46"/>
+        </a:solidFill>
+        <a:effectLst/>
+      </p:bgPr>
+    </p:bg>
+    <p:spTree>
+      <p:nvGrpSpPr>
+        <p:cNvPr id="1" name=""/>
+        <p:cNvGrpSpPr/>
+        <p:nvPr/>
+      </p:nvGrpSpPr>
+      <p:grpSpPr>
+        <a:xfrm>
+          <a:off x="0" y="0"/>
+          <a:ext cx="9144000" cy="5143500"/>
+          <a:chOff x="0" y="0"/>
+          <a:chExt cx="9144000" cy="5143500"/>
+        </a:xfrm>
+      </p:grpSpPr>
+      <p:sp>
+        <p:nvSpPr>
+          <p:cNvPr id="2" name="Title"/>
+          <p:cNvSpPr>
+            <a:spLocks noGrp="1"/>
+          </p:cNvSpPr>
+          <p:nvPr>
+            <p:ph type="title"/>
+          </p:nvPr>
+        </p:nvSpPr>
+        <p:spPr>
+          <a:xfrm>
+            <a:off x="457200" y="137160"/>
+            <a:ext cx="8229600" cy="480060"/>
+          </a:xfrm>
+          <a:prstGeom prst="rect">
+            <a:avLst/>
+          </a:prstGeom>
+        </p:spPr>
+        <p:txBody>
+          <a:bodyPr/>
+          <a:lstStyle/>
+          <a:p>
+            <a:r>
+              <a:rPr lang="fr-FR" sz="2400" b="1" dirty="0">
+                <a:solidFill>
+                  <a:srgbClr val="FFFFFF"/>
+                </a:solidFill>
+                <a:latin typeface="Arial Black"/>
+              </a:rPr>
+              <a:t>SCHÉMA D’ARCHITECTURE</a:t>
+            </a:r>
+          </a:p>
+        </p:txBody>
+      </p:sp>
+      <p:pic>
+        <p:nvPicPr>
+          <p:cNvPr id="3" name="schema"/>
+          <p:cNvPicPr/>
+          <p:nvPr/>
+        </p:nvPicPr>
+        <p:blipFill>
+          <a:blip r:embed="rId2"/>
+          <a:stretch>
+            <a:fillRect/>
+          </a:stretch>
+        </p:blipFill>
+        <p:spPr>
+          <a:xfrm>
+            <a:off x="228600" y="685800"/>
+            <a:ext cx="8686800" cy="4343400"/>
+          </a:xfrm>
+          <a:prstGeom prst="rect">
+            <a:avLst/>
+          </a:prstGeom>
+        </p:spPr>
+      </p:pic>
     </p:spTree>
   </p:cSld>
   <p:clrMapOvr>
